--- a/Course content/Slides/Topic 3 - Resampling methods and fine-tuning.pptx
+++ b/Course content/Slides/Topic 3 - Resampling methods and fine-tuning.pptx
@@ -221,7 +221,7 @@
           <a:p>
             <a:fld id="{B9B1DC7F-8587-4047-9A5D-1FCB6614CAE0}" type="datetimeFigureOut">
               <a:rPr lang="en-US" smtClean="0"/>
-              <a:t>10/4/2022</a:t>
+              <a:t>10/20/2022</a:t>
             </a:fld>
             <a:endParaRPr lang="en-US"/>
           </a:p>
@@ -722,7 +722,7 @@
           <a:p>
             <a:fld id="{A7DB5662-7327-465C-9A70-AD96B7A8D67A}" type="datetimeFigureOut">
               <a:rPr lang="en-US" smtClean="0"/>
-              <a:t>10/4/2022</a:t>
+              <a:t>10/20/2022</a:t>
             </a:fld>
             <a:endParaRPr lang="en-US"/>
           </a:p>
@@ -920,7 +920,7 @@
           <a:p>
             <a:fld id="{A7DB5662-7327-465C-9A70-AD96B7A8D67A}" type="datetimeFigureOut">
               <a:rPr lang="en-US" smtClean="0"/>
-              <a:t>10/4/2022</a:t>
+              <a:t>10/20/2022</a:t>
             </a:fld>
             <a:endParaRPr lang="en-US"/>
           </a:p>
@@ -1128,7 +1128,7 @@
           <a:p>
             <a:fld id="{A7DB5662-7327-465C-9A70-AD96B7A8D67A}" type="datetimeFigureOut">
               <a:rPr lang="en-US" smtClean="0"/>
-              <a:t>10/4/2022</a:t>
+              <a:t>10/20/2022</a:t>
             </a:fld>
             <a:endParaRPr lang="en-US"/>
           </a:p>
@@ -1326,7 +1326,7 @@
           <a:p>
             <a:fld id="{A7DB5662-7327-465C-9A70-AD96B7A8D67A}" type="datetimeFigureOut">
               <a:rPr lang="en-US" smtClean="0"/>
-              <a:t>10/4/2022</a:t>
+              <a:t>10/20/2022</a:t>
             </a:fld>
             <a:endParaRPr lang="en-US"/>
           </a:p>
@@ -1601,7 +1601,7 @@
           <a:p>
             <a:fld id="{A7DB5662-7327-465C-9A70-AD96B7A8D67A}" type="datetimeFigureOut">
               <a:rPr lang="en-US" smtClean="0"/>
-              <a:t>10/4/2022</a:t>
+              <a:t>10/20/2022</a:t>
             </a:fld>
             <a:endParaRPr lang="en-US"/>
           </a:p>
@@ -1866,7 +1866,7 @@
           <a:p>
             <a:fld id="{A7DB5662-7327-465C-9A70-AD96B7A8D67A}" type="datetimeFigureOut">
               <a:rPr lang="en-US" smtClean="0"/>
-              <a:t>10/4/2022</a:t>
+              <a:t>10/20/2022</a:t>
             </a:fld>
             <a:endParaRPr lang="en-US"/>
           </a:p>
@@ -2278,7 +2278,7 @@
           <a:p>
             <a:fld id="{A7DB5662-7327-465C-9A70-AD96B7A8D67A}" type="datetimeFigureOut">
               <a:rPr lang="en-US" smtClean="0"/>
-              <a:t>10/4/2022</a:t>
+              <a:t>10/20/2022</a:t>
             </a:fld>
             <a:endParaRPr lang="en-US"/>
           </a:p>
@@ -2419,7 +2419,7 @@
           <a:p>
             <a:fld id="{A7DB5662-7327-465C-9A70-AD96B7A8D67A}" type="datetimeFigureOut">
               <a:rPr lang="en-US" smtClean="0"/>
-              <a:t>10/4/2022</a:t>
+              <a:t>10/20/2022</a:t>
             </a:fld>
             <a:endParaRPr lang="en-US"/>
           </a:p>
@@ -2532,7 +2532,7 @@
           <a:p>
             <a:fld id="{A7DB5662-7327-465C-9A70-AD96B7A8D67A}" type="datetimeFigureOut">
               <a:rPr lang="en-US" smtClean="0"/>
-              <a:t>10/4/2022</a:t>
+              <a:t>10/20/2022</a:t>
             </a:fld>
             <a:endParaRPr lang="en-US"/>
           </a:p>
@@ -2843,7 +2843,7 @@
           <a:p>
             <a:fld id="{A7DB5662-7327-465C-9A70-AD96B7A8D67A}" type="datetimeFigureOut">
               <a:rPr lang="en-US" smtClean="0"/>
-              <a:t>10/4/2022</a:t>
+              <a:t>10/20/2022</a:t>
             </a:fld>
             <a:endParaRPr lang="en-US"/>
           </a:p>
@@ -3131,7 +3131,7 @@
           <a:p>
             <a:fld id="{A7DB5662-7327-465C-9A70-AD96B7A8D67A}" type="datetimeFigureOut">
               <a:rPr lang="en-US" smtClean="0"/>
-              <a:t>10/4/2022</a:t>
+              <a:t>10/20/2022</a:t>
             </a:fld>
             <a:endParaRPr lang="en-US"/>
           </a:p>
@@ -3372,7 +3372,7 @@
           <a:p>
             <a:fld id="{A7DB5662-7327-465C-9A70-AD96B7A8D67A}" type="datetimeFigureOut">
               <a:rPr lang="en-US" smtClean="0"/>
-              <a:t>10/4/2022</a:t>
+              <a:t>10/20/2022</a:t>
             </a:fld>
             <a:endParaRPr lang="en-US"/>
           </a:p>
@@ -3830,10 +3830,16 @@
               </a:rPr>
             </a:br>
             <a:r>
+              <a:rPr lang="en-US" sz="4000">
+                <a:cs typeface="Times New Roman" panose="02020603050405020304" pitchFamily="18" charset="0"/>
+              </a:rPr>
+              <a:t>Topic 3 </a:t>
+            </a:r>
+            <a:r>
               <a:rPr lang="en-US" sz="4000" dirty="0">
                 <a:cs typeface="Times New Roman" panose="02020603050405020304" pitchFamily="18" charset="0"/>
               </a:rPr>
-              <a:t>Topic 2 – </a:t>
+              <a:t>– </a:t>
             </a:r>
             <a:r>
               <a:rPr lang="en-US" sz="4000" dirty="0"/>

--- a/Course content/Slides/Topic 3 - Resampling methods and fine-tuning.pptx
+++ b/Course content/Slides/Topic 3 - Resampling methods and fine-tuning.pptx
@@ -139,6 +139,112 @@
 </p:presentation>
 </file>
 
+<file path=ppt/revisionInfo.xml><?xml version="1.0" encoding="utf-8"?>
+<p1510:revInfo xmlns:a="http://schemas.openxmlformats.org/drawingml/2006/main" xmlns:r="http://schemas.openxmlformats.org/officeDocument/2006/relationships" xmlns:p1510="http://schemas.microsoft.com/office/powerpoint/2015/10/main">
+  <p1510:revLst>
+    <p1510:client id="{E501FCAF-15F3-4891-8B13-9BA3562FF871}" v="3" dt="2023-10-30T15:23:34.757"/>
+  </p1510:revLst>
+</p1510:revInfo>
+</file>
+
+<file path=ppt/changesInfos/changesInfo1.xml><?xml version="1.0" encoding="utf-8"?>
+<pc:chgInfo xmlns:a="http://schemas.openxmlformats.org/drawingml/2006/main" xmlns:r="http://schemas.openxmlformats.org/officeDocument/2006/relationships" xmlns:ac="http://schemas.microsoft.com/office/drawing/2013/main/command" xmlns:pc="http://schemas.microsoft.com/office/powerpoint/2013/main/command">
+  <pc:docChgLst>
+    <pc:chgData name="Javier Bas Vicente" userId="96bf8a96-3310-496c-8c7e-8a087f977faa" providerId="ADAL" clId="{E501FCAF-15F3-4891-8B13-9BA3562FF871}"/>
+    <pc:docChg chg="custSel modSld">
+      <pc:chgData name="Javier Bas Vicente" userId="96bf8a96-3310-496c-8c7e-8a087f977faa" providerId="ADAL" clId="{E501FCAF-15F3-4891-8B13-9BA3562FF871}" dt="2023-10-30T15:26:56.878" v="239" actId="20577"/>
+      <pc:docMkLst>
+        <pc:docMk/>
+      </pc:docMkLst>
+      <pc:sldChg chg="modSp mod">
+        <pc:chgData name="Javier Bas Vicente" userId="96bf8a96-3310-496c-8c7e-8a087f977faa" providerId="ADAL" clId="{E501FCAF-15F3-4891-8B13-9BA3562FF871}" dt="2023-10-30T14:58:26.765" v="0" actId="113"/>
+        <pc:sldMkLst>
+          <pc:docMk/>
+          <pc:sldMk cId="1899848865" sldId="260"/>
+        </pc:sldMkLst>
+        <pc:spChg chg="mod">
+          <ac:chgData name="Javier Bas Vicente" userId="96bf8a96-3310-496c-8c7e-8a087f977faa" providerId="ADAL" clId="{E501FCAF-15F3-4891-8B13-9BA3562FF871}" dt="2023-10-30T14:58:26.765" v="0" actId="113"/>
+          <ac:spMkLst>
+            <pc:docMk/>
+            <pc:sldMk cId="1899848865" sldId="260"/>
+            <ac:spMk id="3" creationId="{FD20A7E1-293D-4EBB-5482-A89116CE4DB9}"/>
+          </ac:spMkLst>
+        </pc:spChg>
+      </pc:sldChg>
+      <pc:sldChg chg="addSp modSp mod">
+        <pc:chgData name="Javier Bas Vicente" userId="96bf8a96-3310-496c-8c7e-8a087f977faa" providerId="ADAL" clId="{E501FCAF-15F3-4891-8B13-9BA3562FF871}" dt="2023-10-30T15:24:07.360" v="211" actId="1038"/>
+        <pc:sldMkLst>
+          <pc:docMk/>
+          <pc:sldMk cId="2041909992" sldId="264"/>
+        </pc:sldMkLst>
+        <pc:cxnChg chg="add mod">
+          <ac:chgData name="Javier Bas Vicente" userId="96bf8a96-3310-496c-8c7e-8a087f977faa" providerId="ADAL" clId="{E501FCAF-15F3-4891-8B13-9BA3562FF871}" dt="2023-10-30T15:23:14.550" v="5" actId="1582"/>
+          <ac:cxnSpMkLst>
+            <pc:docMk/>
+            <pc:sldMk cId="2041909992" sldId="264"/>
+            <ac:cxnSpMk id="10" creationId="{090D2A4F-57A8-ED41-6EB6-E7465A0B5695}"/>
+          </ac:cxnSpMkLst>
+        </pc:cxnChg>
+        <pc:cxnChg chg="add mod">
+          <ac:chgData name="Javier Bas Vicente" userId="96bf8a96-3310-496c-8c7e-8a087f977faa" providerId="ADAL" clId="{E501FCAF-15F3-4891-8B13-9BA3562FF871}" dt="2023-10-30T15:23:56.833" v="210" actId="1038"/>
+          <ac:cxnSpMkLst>
+            <pc:docMk/>
+            <pc:sldMk cId="2041909992" sldId="264"/>
+            <ac:cxnSpMk id="11" creationId="{9E8E8C73-1DCC-27BA-D8FF-750006F0B48F}"/>
+          </ac:cxnSpMkLst>
+        </pc:cxnChg>
+        <pc:cxnChg chg="add mod">
+          <ac:chgData name="Javier Bas Vicente" userId="96bf8a96-3310-496c-8c7e-8a087f977faa" providerId="ADAL" clId="{E501FCAF-15F3-4891-8B13-9BA3562FF871}" dt="2023-10-30T15:23:53.371" v="209" actId="1037"/>
+          <ac:cxnSpMkLst>
+            <pc:docMk/>
+            <pc:sldMk cId="2041909992" sldId="264"/>
+            <ac:cxnSpMk id="12" creationId="{56E7DFD1-6483-D3DD-6FA2-1212B49D5F36}"/>
+          </ac:cxnSpMkLst>
+        </pc:cxnChg>
+        <pc:cxnChg chg="add mod">
+          <ac:chgData name="Javier Bas Vicente" userId="96bf8a96-3310-496c-8c7e-8a087f977faa" providerId="ADAL" clId="{E501FCAF-15F3-4891-8B13-9BA3562FF871}" dt="2023-10-30T15:24:07.360" v="211" actId="1038"/>
+          <ac:cxnSpMkLst>
+            <pc:docMk/>
+            <pc:sldMk cId="2041909992" sldId="264"/>
+            <ac:cxnSpMk id="13" creationId="{3E2B2F4C-5F45-1520-C632-5B39055EB64E}"/>
+          </ac:cxnSpMkLst>
+        </pc:cxnChg>
+      </pc:sldChg>
+      <pc:sldChg chg="modSp mod">
+        <pc:chgData name="Javier Bas Vicente" userId="96bf8a96-3310-496c-8c7e-8a087f977faa" providerId="ADAL" clId="{E501FCAF-15F3-4891-8B13-9BA3562FF871}" dt="2023-10-30T15:25:03.739" v="217" actId="20577"/>
+        <pc:sldMkLst>
+          <pc:docMk/>
+          <pc:sldMk cId="2341972571" sldId="265"/>
+        </pc:sldMkLst>
+        <pc:spChg chg="mod">
+          <ac:chgData name="Javier Bas Vicente" userId="96bf8a96-3310-496c-8c7e-8a087f977faa" providerId="ADAL" clId="{E501FCAF-15F3-4891-8B13-9BA3562FF871}" dt="2023-10-30T15:25:03.739" v="217" actId="20577"/>
+          <ac:spMkLst>
+            <pc:docMk/>
+            <pc:sldMk cId="2341972571" sldId="265"/>
+            <ac:spMk id="3" creationId="{FD20A7E1-293D-4EBB-5482-A89116CE4DB9}"/>
+          </ac:spMkLst>
+        </pc:spChg>
+      </pc:sldChg>
+      <pc:sldChg chg="modSp mod">
+        <pc:chgData name="Javier Bas Vicente" userId="96bf8a96-3310-496c-8c7e-8a087f977faa" providerId="ADAL" clId="{E501FCAF-15F3-4891-8B13-9BA3562FF871}" dt="2023-10-30T15:26:56.878" v="239" actId="20577"/>
+        <pc:sldMkLst>
+          <pc:docMk/>
+          <pc:sldMk cId="2641220665" sldId="266"/>
+        </pc:sldMkLst>
+        <pc:spChg chg="mod">
+          <ac:chgData name="Javier Bas Vicente" userId="96bf8a96-3310-496c-8c7e-8a087f977faa" providerId="ADAL" clId="{E501FCAF-15F3-4891-8B13-9BA3562FF871}" dt="2023-10-30T15:26:56.878" v="239" actId="20577"/>
+          <ac:spMkLst>
+            <pc:docMk/>
+            <pc:sldMk cId="2641220665" sldId="266"/>
+            <ac:spMk id="3" creationId="{FD20A7E1-293D-4EBB-5482-A89116CE4DB9}"/>
+          </ac:spMkLst>
+        </pc:spChg>
+      </pc:sldChg>
+    </pc:docChg>
+  </pc:docChgLst>
+</pc:chgInfo>
+</file>
+
 <file path=ppt/notesMasters/notesMaster1.xml><?xml version="1.0" encoding="utf-8"?>
 <p:notesMaster xmlns:a="http://schemas.openxmlformats.org/drawingml/2006/main" xmlns:r="http://schemas.openxmlformats.org/officeDocument/2006/relationships" xmlns:p="http://schemas.openxmlformats.org/presentationml/2006/main">
   <p:cSld>
@@ -221,7 +327,7 @@
           <a:p>
             <a:fld id="{B9B1DC7F-8587-4047-9A5D-1FCB6614CAE0}" type="datetimeFigureOut">
               <a:rPr lang="en-US" smtClean="0"/>
-              <a:t>10/20/2022</a:t>
+              <a:t>10/30/2023</a:t>
             </a:fld>
             <a:endParaRPr lang="en-US"/>
           </a:p>
@@ -722,7 +828,7 @@
           <a:p>
             <a:fld id="{A7DB5662-7327-465C-9A70-AD96B7A8D67A}" type="datetimeFigureOut">
               <a:rPr lang="en-US" smtClean="0"/>
-              <a:t>10/20/2022</a:t>
+              <a:t>10/30/2023</a:t>
             </a:fld>
             <a:endParaRPr lang="en-US"/>
           </a:p>
@@ -920,7 +1026,7 @@
           <a:p>
             <a:fld id="{A7DB5662-7327-465C-9A70-AD96B7A8D67A}" type="datetimeFigureOut">
               <a:rPr lang="en-US" smtClean="0"/>
-              <a:t>10/20/2022</a:t>
+              <a:t>10/30/2023</a:t>
             </a:fld>
             <a:endParaRPr lang="en-US"/>
           </a:p>
@@ -1128,7 +1234,7 @@
           <a:p>
             <a:fld id="{A7DB5662-7327-465C-9A70-AD96B7A8D67A}" type="datetimeFigureOut">
               <a:rPr lang="en-US" smtClean="0"/>
-              <a:t>10/20/2022</a:t>
+              <a:t>10/30/2023</a:t>
             </a:fld>
             <a:endParaRPr lang="en-US"/>
           </a:p>
@@ -1326,7 +1432,7 @@
           <a:p>
             <a:fld id="{A7DB5662-7327-465C-9A70-AD96B7A8D67A}" type="datetimeFigureOut">
               <a:rPr lang="en-US" smtClean="0"/>
-              <a:t>10/20/2022</a:t>
+              <a:t>10/30/2023</a:t>
             </a:fld>
             <a:endParaRPr lang="en-US"/>
           </a:p>
@@ -1601,7 +1707,7 @@
           <a:p>
             <a:fld id="{A7DB5662-7327-465C-9A70-AD96B7A8D67A}" type="datetimeFigureOut">
               <a:rPr lang="en-US" smtClean="0"/>
-              <a:t>10/20/2022</a:t>
+              <a:t>10/30/2023</a:t>
             </a:fld>
             <a:endParaRPr lang="en-US"/>
           </a:p>
@@ -1866,7 +1972,7 @@
           <a:p>
             <a:fld id="{A7DB5662-7327-465C-9A70-AD96B7A8D67A}" type="datetimeFigureOut">
               <a:rPr lang="en-US" smtClean="0"/>
-              <a:t>10/20/2022</a:t>
+              <a:t>10/30/2023</a:t>
             </a:fld>
             <a:endParaRPr lang="en-US"/>
           </a:p>
@@ -2278,7 +2384,7 @@
           <a:p>
             <a:fld id="{A7DB5662-7327-465C-9A70-AD96B7A8D67A}" type="datetimeFigureOut">
               <a:rPr lang="en-US" smtClean="0"/>
-              <a:t>10/20/2022</a:t>
+              <a:t>10/30/2023</a:t>
             </a:fld>
             <a:endParaRPr lang="en-US"/>
           </a:p>
@@ -2419,7 +2525,7 @@
           <a:p>
             <a:fld id="{A7DB5662-7327-465C-9A70-AD96B7A8D67A}" type="datetimeFigureOut">
               <a:rPr lang="en-US" smtClean="0"/>
-              <a:t>10/20/2022</a:t>
+              <a:t>10/30/2023</a:t>
             </a:fld>
             <a:endParaRPr lang="en-US"/>
           </a:p>
@@ -2532,7 +2638,7 @@
           <a:p>
             <a:fld id="{A7DB5662-7327-465C-9A70-AD96B7A8D67A}" type="datetimeFigureOut">
               <a:rPr lang="en-US" smtClean="0"/>
-              <a:t>10/20/2022</a:t>
+              <a:t>10/30/2023</a:t>
             </a:fld>
             <a:endParaRPr lang="en-US"/>
           </a:p>
@@ -2843,7 +2949,7 @@
           <a:p>
             <a:fld id="{A7DB5662-7327-465C-9A70-AD96B7A8D67A}" type="datetimeFigureOut">
               <a:rPr lang="en-US" smtClean="0"/>
-              <a:t>10/20/2022</a:t>
+              <a:t>10/30/2023</a:t>
             </a:fld>
             <a:endParaRPr lang="en-US"/>
           </a:p>
@@ -3131,7 +3237,7 @@
           <a:p>
             <a:fld id="{A7DB5662-7327-465C-9A70-AD96B7A8D67A}" type="datetimeFigureOut">
               <a:rPr lang="en-US" smtClean="0"/>
-              <a:t>10/20/2022</a:t>
+              <a:t>10/30/2023</a:t>
             </a:fld>
             <a:endParaRPr lang="en-US"/>
           </a:p>
@@ -3372,7 +3478,7 @@
           <a:p>
             <a:fld id="{A7DB5662-7327-465C-9A70-AD96B7A8D67A}" type="datetimeFigureOut">
               <a:rPr lang="en-US" smtClean="0"/>
-              <a:t>10/20/2022</a:t>
+              <a:t>10/30/2023</a:t>
             </a:fld>
             <a:endParaRPr lang="en-US"/>
           </a:p>
@@ -21864,7 +21970,19 @@
               <a:rPr lang="en-US" sz="2200" dirty="0">
                 <a:latin typeface="+mj-lt"/>
               </a:rPr>
-              <a:t>But there are also non-computational advantages. Some variability occurs in CV estimates due to the variability on how the observations are divided into ten folds. But it is typically lower than the variability resulting from the validation set approach.</a:t>
+              <a:t>But there are also non-computational advantages. Some variability occurs in CV estimates due to the variability on how the observations are divided into the </a:t>
+            </a:r>
+            <a:r>
+              <a:rPr lang="en-US" sz="2200" i="1" dirty="0">
+                <a:latin typeface="+mj-lt"/>
+              </a:rPr>
+              <a:t>k</a:t>
+            </a:r>
+            <a:r>
+              <a:rPr lang="en-US" sz="2200" dirty="0">
+                <a:latin typeface="+mj-lt"/>
+              </a:rPr>
+              <a:t> folds. But it is typically lower than the variability resulting from the validation set approach.</a:t>
             </a:r>
           </a:p>
           <a:p>
@@ -23294,7 +23412,7 @@
               <a:rPr lang="en-US" sz="2000" dirty="0">
                 <a:latin typeface="+mj-lt"/>
               </a:rPr>
-              <a:t>Number of trees in a Random Forest or the maximum depth of a tree</a:t>
+              <a:t>Number of trees in a Random Forest, maximum depth of a tree…</a:t>
             </a:r>
           </a:p>
           <a:p>
@@ -23357,7 +23475,7 @@
               <a:rPr lang="en-US" sz="2400" dirty="0">
                 <a:latin typeface="+mj-lt"/>
               </a:rPr>
-              <a:t>. We need to experiment with several values for them in order to look for the better combination. This is called fine-tuning.</a:t>
+              <a:t>. We need to experiment with several values for them to seek for the better combination. This process is called fine-tuning.</a:t>
             </a:r>
             <a:endParaRPr lang="en-US" sz="2400" b="1" dirty="0">
               <a:latin typeface="+mj-lt"/>
@@ -27256,7 +27374,19 @@
               <a:rPr lang="en-US" sz="2000" dirty="0">
                 <a:latin typeface="+mj-lt"/>
               </a:rPr>
-              <a:t>can be highly variable, depending on which observations are included in the training/validation set.</a:t>
+              <a:t>can be </a:t>
+            </a:r>
+            <a:r>
+              <a:rPr lang="en-US" sz="2000" b="1" dirty="0">
+                <a:latin typeface="+mj-lt"/>
+              </a:rPr>
+              <a:t>highly variable, depending on which observations are included in the training/validation set</a:t>
+            </a:r>
+            <a:r>
+              <a:rPr lang="en-US" sz="2000" dirty="0">
+                <a:latin typeface="+mj-lt"/>
+              </a:rPr>
+              <a:t>.</a:t>
             </a:r>
           </a:p>
         </p:txBody>
@@ -30094,6 +30224,154 @@
           </a:prstGeom>
         </p:spPr>
       </p:pic>
+      <p:cxnSp>
+        <p:nvCxnSpPr>
+          <p:cNvPr id="10" name="Straight Connector 9">
+            <a:extLst>
+              <a:ext uri="{FF2B5EF4-FFF2-40B4-BE49-F238E27FC236}">
+                <a16:creationId xmlns:a16="http://schemas.microsoft.com/office/drawing/2014/main" id="{090D2A4F-57A8-ED41-6EB6-E7465A0B5695}"/>
+              </a:ext>
+            </a:extLst>
+          </p:cNvPr>
+          <p:cNvCxnSpPr/>
+          <p:nvPr/>
+        </p:nvCxnSpPr>
+        <p:spPr>
+          <a:xfrm>
+            <a:off x="4879298" y="4826833"/>
+            <a:ext cx="0" cy="1671403"/>
+          </a:xfrm>
+          <a:prstGeom prst="line">
+            <a:avLst/>
+          </a:prstGeom>
+          <a:ln w="19050"/>
+        </p:spPr>
+        <p:style>
+          <a:lnRef idx="1">
+            <a:schemeClr val="accent2"/>
+          </a:lnRef>
+          <a:fillRef idx="0">
+            <a:schemeClr val="accent2"/>
+          </a:fillRef>
+          <a:effectRef idx="0">
+            <a:schemeClr val="accent2"/>
+          </a:effectRef>
+          <a:fontRef idx="minor">
+            <a:schemeClr val="tx1"/>
+          </a:fontRef>
+        </p:style>
+      </p:cxnSp>
+      <p:cxnSp>
+        <p:nvCxnSpPr>
+          <p:cNvPr id="11" name="Straight Connector 10">
+            <a:extLst>
+              <a:ext uri="{FF2B5EF4-FFF2-40B4-BE49-F238E27FC236}">
+                <a16:creationId xmlns:a16="http://schemas.microsoft.com/office/drawing/2014/main" id="{9E8E8C73-1DCC-27BA-D8FF-750006F0B48F}"/>
+              </a:ext>
+            </a:extLst>
+          </p:cNvPr>
+          <p:cNvCxnSpPr/>
+          <p:nvPr/>
+        </p:nvCxnSpPr>
+        <p:spPr>
+          <a:xfrm>
+            <a:off x="5758715" y="4829333"/>
+            <a:ext cx="0" cy="1671403"/>
+          </a:xfrm>
+          <a:prstGeom prst="line">
+            <a:avLst/>
+          </a:prstGeom>
+          <a:ln w="19050"/>
+        </p:spPr>
+        <p:style>
+          <a:lnRef idx="1">
+            <a:schemeClr val="accent2"/>
+          </a:lnRef>
+          <a:fillRef idx="0">
+            <a:schemeClr val="accent2"/>
+          </a:fillRef>
+          <a:effectRef idx="0">
+            <a:schemeClr val="accent2"/>
+          </a:effectRef>
+          <a:fontRef idx="minor">
+            <a:schemeClr val="tx1"/>
+          </a:fontRef>
+        </p:style>
+      </p:cxnSp>
+      <p:cxnSp>
+        <p:nvCxnSpPr>
+          <p:cNvPr id="12" name="Straight Connector 11">
+            <a:extLst>
+              <a:ext uri="{FF2B5EF4-FFF2-40B4-BE49-F238E27FC236}">
+                <a16:creationId xmlns:a16="http://schemas.microsoft.com/office/drawing/2014/main" id="{56E7DFD1-6483-D3DD-6FA2-1212B49D5F36}"/>
+              </a:ext>
+            </a:extLst>
+          </p:cNvPr>
+          <p:cNvCxnSpPr/>
+          <p:nvPr/>
+        </p:nvCxnSpPr>
+        <p:spPr>
+          <a:xfrm>
+            <a:off x="6613161" y="4844323"/>
+            <a:ext cx="0" cy="1671403"/>
+          </a:xfrm>
+          <a:prstGeom prst="line">
+            <a:avLst/>
+          </a:prstGeom>
+          <a:ln w="19050"/>
+        </p:spPr>
+        <p:style>
+          <a:lnRef idx="1">
+            <a:schemeClr val="accent2"/>
+          </a:lnRef>
+          <a:fillRef idx="0">
+            <a:schemeClr val="accent2"/>
+          </a:fillRef>
+          <a:effectRef idx="0">
+            <a:schemeClr val="accent2"/>
+          </a:effectRef>
+          <a:fontRef idx="minor">
+            <a:schemeClr val="tx1"/>
+          </a:fontRef>
+        </p:style>
+      </p:cxnSp>
+      <p:cxnSp>
+        <p:nvCxnSpPr>
+          <p:cNvPr id="13" name="Straight Connector 12">
+            <a:extLst>
+              <a:ext uri="{FF2B5EF4-FFF2-40B4-BE49-F238E27FC236}">
+                <a16:creationId xmlns:a16="http://schemas.microsoft.com/office/drawing/2014/main" id="{3E2B2F4C-5F45-1520-C632-5B39055EB64E}"/>
+              </a:ext>
+            </a:extLst>
+          </p:cNvPr>
+          <p:cNvCxnSpPr/>
+          <p:nvPr/>
+        </p:nvCxnSpPr>
+        <p:spPr>
+          <a:xfrm>
+            <a:off x="7302707" y="4844323"/>
+            <a:ext cx="0" cy="1671403"/>
+          </a:xfrm>
+          <a:prstGeom prst="line">
+            <a:avLst/>
+          </a:prstGeom>
+          <a:ln w="19050"/>
+        </p:spPr>
+        <p:style>
+          <a:lnRef idx="1">
+            <a:schemeClr val="accent2"/>
+          </a:lnRef>
+          <a:fillRef idx="0">
+            <a:schemeClr val="accent2"/>
+          </a:fillRef>
+          <a:effectRef idx="0">
+            <a:schemeClr val="accent2"/>
+          </a:effectRef>
+          <a:fontRef idx="minor">
+            <a:schemeClr val="tx1"/>
+          </a:fontRef>
+        </p:style>
+      </p:cxnSp>
     </p:spTree>
     <p:extLst>
       <p:ext uri="{BB962C8B-B14F-4D97-AF65-F5344CB8AC3E}">

--- a/Course content/Slides/Topic 3 - Resampling methods and fine-tuning.pptx
+++ b/Course content/Slides/Topic 3 - Resampling methods and fine-tuning.pptx
@@ -139,14 +139,6 @@
 </p:presentation>
 </file>
 
-<file path=ppt/revisionInfo.xml><?xml version="1.0" encoding="utf-8"?>
-<p1510:revInfo xmlns:a="http://schemas.openxmlformats.org/drawingml/2006/main" xmlns:r="http://schemas.openxmlformats.org/officeDocument/2006/relationships" xmlns:p1510="http://schemas.microsoft.com/office/powerpoint/2015/10/main">
-  <p1510:revLst>
-    <p1510:client id="{E501FCAF-15F3-4891-8B13-9BA3562FF871}" v="3" dt="2023-10-30T15:23:34.757"/>
-  </p1510:revLst>
-</p1510:revInfo>
-</file>
-
 <file path=ppt/changesInfos/changesInfo1.xml><?xml version="1.0" encoding="utf-8"?>
 <pc:chgInfo xmlns:a="http://schemas.openxmlformats.org/drawingml/2006/main" xmlns:r="http://schemas.openxmlformats.org/officeDocument/2006/relationships" xmlns:ac="http://schemas.microsoft.com/office/drawing/2013/main/command" xmlns:pc="http://schemas.microsoft.com/office/powerpoint/2013/main/command">
   <pc:docChgLst>
@@ -242,6 +234,30 @@
       </pc:sldChg>
     </pc:docChg>
   </pc:docChgLst>
+  <pc:docChgLst>
+    <pc:chgData name="Javier Bas Vicente" userId="96bf8a96-3310-496c-8c7e-8a087f977faa" providerId="ADAL" clId="{5A2FBFEE-E52B-432C-A20F-F1EB9739DA4C}"/>
+    <pc:docChg chg="modSld">
+      <pc:chgData name="Javier Bas Vicente" userId="96bf8a96-3310-496c-8c7e-8a087f977faa" providerId="ADAL" clId="{5A2FBFEE-E52B-432C-A20F-F1EB9739DA4C}" dt="2024-10-19T16:58:13.884" v="0" actId="6549"/>
+      <pc:docMkLst>
+        <pc:docMk/>
+      </pc:docMkLst>
+      <pc:sldChg chg="modSp mod">
+        <pc:chgData name="Javier Bas Vicente" userId="96bf8a96-3310-496c-8c7e-8a087f977faa" providerId="ADAL" clId="{5A2FBFEE-E52B-432C-A20F-F1EB9739DA4C}" dt="2024-10-19T16:58:13.884" v="0" actId="6549"/>
+        <pc:sldMkLst>
+          <pc:docMk/>
+          <pc:sldMk cId="2149080833" sldId="278"/>
+        </pc:sldMkLst>
+        <pc:spChg chg="mod">
+          <ac:chgData name="Javier Bas Vicente" userId="96bf8a96-3310-496c-8c7e-8a087f977faa" providerId="ADAL" clId="{5A2FBFEE-E52B-432C-A20F-F1EB9739DA4C}" dt="2024-10-19T16:58:13.884" v="0" actId="6549"/>
+          <ac:spMkLst>
+            <pc:docMk/>
+            <pc:sldMk cId="2149080833" sldId="278"/>
+            <ac:spMk id="3" creationId="{6866AA87-E000-52D2-F65D-4B414B00BBE5}"/>
+          </ac:spMkLst>
+        </pc:spChg>
+      </pc:sldChg>
+    </pc:docChg>
+  </pc:docChgLst>
 </pc:chgInfo>
 </file>
 
@@ -327,7 +343,7 @@
           <a:p>
             <a:fld id="{B9B1DC7F-8587-4047-9A5D-1FCB6614CAE0}" type="datetimeFigureOut">
               <a:rPr lang="en-US" smtClean="0"/>
-              <a:t>10/30/2023</a:t>
+              <a:t>10/19/2024</a:t>
             </a:fld>
             <a:endParaRPr lang="en-US"/>
           </a:p>
@@ -828,7 +844,7 @@
           <a:p>
             <a:fld id="{A7DB5662-7327-465C-9A70-AD96B7A8D67A}" type="datetimeFigureOut">
               <a:rPr lang="en-US" smtClean="0"/>
-              <a:t>10/30/2023</a:t>
+              <a:t>10/19/2024</a:t>
             </a:fld>
             <a:endParaRPr lang="en-US"/>
           </a:p>
@@ -1026,7 +1042,7 @@
           <a:p>
             <a:fld id="{A7DB5662-7327-465C-9A70-AD96B7A8D67A}" type="datetimeFigureOut">
               <a:rPr lang="en-US" smtClean="0"/>
-              <a:t>10/30/2023</a:t>
+              <a:t>10/19/2024</a:t>
             </a:fld>
             <a:endParaRPr lang="en-US"/>
           </a:p>
@@ -1234,7 +1250,7 @@
           <a:p>
             <a:fld id="{A7DB5662-7327-465C-9A70-AD96B7A8D67A}" type="datetimeFigureOut">
               <a:rPr lang="en-US" smtClean="0"/>
-              <a:t>10/30/2023</a:t>
+              <a:t>10/19/2024</a:t>
             </a:fld>
             <a:endParaRPr lang="en-US"/>
           </a:p>
@@ -1432,7 +1448,7 @@
           <a:p>
             <a:fld id="{A7DB5662-7327-465C-9A70-AD96B7A8D67A}" type="datetimeFigureOut">
               <a:rPr lang="en-US" smtClean="0"/>
-              <a:t>10/30/2023</a:t>
+              <a:t>10/19/2024</a:t>
             </a:fld>
             <a:endParaRPr lang="en-US"/>
           </a:p>
@@ -1707,7 +1723,7 @@
           <a:p>
             <a:fld id="{A7DB5662-7327-465C-9A70-AD96B7A8D67A}" type="datetimeFigureOut">
               <a:rPr lang="en-US" smtClean="0"/>
-              <a:t>10/30/2023</a:t>
+              <a:t>10/19/2024</a:t>
             </a:fld>
             <a:endParaRPr lang="en-US"/>
           </a:p>
@@ -1972,7 +1988,7 @@
           <a:p>
             <a:fld id="{A7DB5662-7327-465C-9A70-AD96B7A8D67A}" type="datetimeFigureOut">
               <a:rPr lang="en-US" smtClean="0"/>
-              <a:t>10/30/2023</a:t>
+              <a:t>10/19/2024</a:t>
             </a:fld>
             <a:endParaRPr lang="en-US"/>
           </a:p>
@@ -2384,7 +2400,7 @@
           <a:p>
             <a:fld id="{A7DB5662-7327-465C-9A70-AD96B7A8D67A}" type="datetimeFigureOut">
               <a:rPr lang="en-US" smtClean="0"/>
-              <a:t>10/30/2023</a:t>
+              <a:t>10/19/2024</a:t>
             </a:fld>
             <a:endParaRPr lang="en-US"/>
           </a:p>
@@ -2525,7 +2541,7 @@
           <a:p>
             <a:fld id="{A7DB5662-7327-465C-9A70-AD96B7A8D67A}" type="datetimeFigureOut">
               <a:rPr lang="en-US" smtClean="0"/>
-              <a:t>10/30/2023</a:t>
+              <a:t>10/19/2024</a:t>
             </a:fld>
             <a:endParaRPr lang="en-US"/>
           </a:p>
@@ -2638,7 +2654,7 @@
           <a:p>
             <a:fld id="{A7DB5662-7327-465C-9A70-AD96B7A8D67A}" type="datetimeFigureOut">
               <a:rPr lang="en-US" smtClean="0"/>
-              <a:t>10/30/2023</a:t>
+              <a:t>10/19/2024</a:t>
             </a:fld>
             <a:endParaRPr lang="en-US"/>
           </a:p>
@@ -2949,7 +2965,7 @@
           <a:p>
             <a:fld id="{A7DB5662-7327-465C-9A70-AD96B7A8D67A}" type="datetimeFigureOut">
               <a:rPr lang="en-US" smtClean="0"/>
-              <a:t>10/30/2023</a:t>
+              <a:t>10/19/2024</a:t>
             </a:fld>
             <a:endParaRPr lang="en-US"/>
           </a:p>
@@ -3237,7 +3253,7 @@
           <a:p>
             <a:fld id="{A7DB5662-7327-465C-9A70-AD96B7A8D67A}" type="datetimeFigureOut">
               <a:rPr lang="en-US" smtClean="0"/>
-              <a:t>10/30/2023</a:t>
+              <a:t>10/19/2024</a:t>
             </a:fld>
             <a:endParaRPr lang="en-US"/>
           </a:p>
@@ -3478,7 +3494,7 @@
           <a:p>
             <a:fld id="{A7DB5662-7327-465C-9A70-AD96B7A8D67A}" type="datetimeFigureOut">
               <a:rPr lang="en-US" smtClean="0"/>
-              <a:t>10/30/2023</a:t>
+              <a:t>10/19/2024</a:t>
             </a:fld>
             <a:endParaRPr lang="en-US"/>
           </a:p>
@@ -4031,13 +4047,6 @@
             </a:r>
           </a:p>
           <a:p>
-            <a:r>
-              <a:rPr lang="es-ES" sz="2000" dirty="0">
-                <a:latin typeface="+mj-lt"/>
-                <a:cs typeface="Times New Roman" panose="02020603050405020304" pitchFamily="18" charset="0"/>
-              </a:rPr>
-              <a:t>2022/2023</a:t>
-            </a:r>
             <a:endParaRPr lang="en-US" sz="2000" dirty="0">
               <a:latin typeface="+mj-lt"/>
               <a:cs typeface="Times New Roman" panose="02020603050405020304" pitchFamily="18" charset="0"/>
